--- a/deck/vector-marketing-01-obsidian-neon.pptx
+++ b/deck/vector-marketing-01-obsidian-neon.pptx
@@ -3565,7 +3565,7 @@
                 </a:solidFill>
                 <a:latin typeface="Inter Display"/>
               </a:rPr>
-              <a:t>158</a:t>
+              <a:t>161</a:t>
             </a:r>
           </a:p>
         </p:txBody>
@@ -6663,7 +6663,7 @@
                 </a:solidFill>
                 <a:latin typeface="Inter"/>
               </a:rPr>
-              <a:t>40 PM-скиллов в 4 группах, 19 агентов, 158 навыков</a:t>
+              <a:t>40 PM-скиллов в 4 группах, 19 агентов, 161 навык</a:t>
             </a:r>
           </a:p>
         </p:txBody>
@@ -8123,7 +8123,7 @@
                 </a:solidFill>
                 <a:latin typeface="Inter"/>
               </a:rPr>
-              <a:t>7 файлов общего контекста:</a:t>
+              <a:t>8 файлов общего контекста:</a:t>
             </a:r>
           </a:p>
         </p:txBody>
@@ -8228,7 +8228,7 @@
                 </a:solidFill>
                 <a:latin typeface="Inter"/>
               </a:rPr>
-              <a:t>данные о компании</a:t>
+              <a:t>правовые границы</a:t>
             </a:r>
           </a:p>
         </p:txBody>
@@ -11471,7 +11471,7 @@
                 </a:solidFill>
                 <a:latin typeface="Inter"/>
               </a:rPr>
-              <a:t>agents/*.md (19 ролей) + Hermes profile + 158 навыков в 6 наборах + MCP-инструменты: Яндекс Метрика/Директ API, MPSTATS, ДaData, Wordstat, карты</a:t>
+              <a:t>agents/*.md (19 ролей) + Hermes profile + 161 навык в 14 наборах + MCP-инструменты: Яндекс Метрика/Директ API, MPSTATS, ДaData, Wordstat, карты</a:t>
             </a:r>
           </a:p>
         </p:txBody>
@@ -11945,11 +11945,11 @@
         <p:spPr>
           <a:xfrm>
             <a:off x="566928" y="1874519"/>
-            <a:ext cx="11064240" cy="914400"/>
+            <a:ext cx="11064240" cy="777240"/>
           </a:xfrm>
           <a:prstGeom prst="roundRect">
             <a:avLst>
-              <a:gd name="adj" fmla="val 9000"/>
+              <a:gd name="adj" fmla="val 10588"/>
             </a:avLst>
           </a:prstGeom>
           <a:solidFill>
@@ -11993,7 +11993,7 @@
         <p:spPr>
           <a:xfrm>
             <a:off x="566928" y="1874519"/>
-            <a:ext cx="45720" cy="914400"/>
+            <a:ext cx="45720" cy="777240"/>
           </a:xfrm>
           <a:prstGeom prst="rect">
             <a:avLst/>
@@ -12106,12 +12106,12 @@
         </p:nvSpPr>
         <p:spPr>
           <a:xfrm>
-            <a:off x="566928" y="2916936"/>
-            <a:ext cx="11064240" cy="1234440"/>
+            <a:off x="566928" y="2761487"/>
+            <a:ext cx="11064240" cy="777240"/>
           </a:xfrm>
           <a:prstGeom prst="roundRect">
             <a:avLst>
-              <a:gd name="adj" fmla="val 6666"/>
+              <a:gd name="adj" fmla="val 10588"/>
             </a:avLst>
           </a:prstGeom>
           <a:solidFill>
@@ -12154,8 +12154,8 @@
         </p:nvSpPr>
         <p:spPr>
           <a:xfrm>
-            <a:off x="566928" y="2916936"/>
-            <a:ext cx="45720" cy="1234440"/>
+            <a:off x="566928" y="2761487"/>
+            <a:ext cx="45720" cy="777240"/>
           </a:xfrm>
           <a:prstGeom prst="rect">
             <a:avLst/>
@@ -12198,7 +12198,7 @@
         </p:nvSpPr>
         <p:spPr>
           <a:xfrm>
-            <a:off x="859536" y="3136391"/>
+            <a:off x="859536" y="2980944"/>
             <a:ext cx="10424160" cy="320040"/>
           </a:xfrm>
           <a:prstGeom prst="rect">
@@ -12233,7 +12233,7 @@
         </p:nvSpPr>
         <p:spPr>
           <a:xfrm>
-            <a:off x="859536" y="3538728"/>
+            <a:off x="859536" y="3383279"/>
             <a:ext cx="10424160" cy="274320"/>
           </a:xfrm>
           <a:prstGeom prst="rect">
@@ -12255,7 +12255,7 @@
                 </a:solidFill>
                 <a:latin typeface="Inter"/>
               </a:rPr>
-              <a:t>performance (медиапланы, pre-mortem, GTM) · yandex-direct · seo (GEO/AEO) · vk-ads · avito · marketplaces (Ozon/WB)</a:t>
+              <a:t>performance (медиапланы, pre-mortem, GTM) · seo (GEO/AEO) · marketplaces (Ozon/WB, юнит-экономика) · yandex-direct · avito · vk-ads*</a:t>
             </a:r>
           </a:p>
         </p:txBody>
@@ -12268,12 +12268,12 @@
         </p:nvSpPr>
         <p:spPr>
           <a:xfrm>
-            <a:off x="566928" y="4279392"/>
-            <a:ext cx="11064240" cy="1234440"/>
+            <a:off x="566928" y="3648455"/>
+            <a:ext cx="11064240" cy="777240"/>
           </a:xfrm>
           <a:prstGeom prst="roundRect">
             <a:avLst>
-              <a:gd name="adj" fmla="val 6666"/>
+              <a:gd name="adj" fmla="val 10588"/>
             </a:avLst>
           </a:prstGeom>
           <a:solidFill>
@@ -12316,8 +12316,8 @@
         </p:nvSpPr>
         <p:spPr>
           <a:xfrm>
-            <a:off x="566928" y="4279392"/>
-            <a:ext cx="45720" cy="1234440"/>
+            <a:off x="566928" y="3648455"/>
+            <a:ext cx="45720" cy="777240"/>
           </a:xfrm>
           <a:prstGeom prst="rect">
             <a:avLst/>
@@ -12360,7 +12360,7 @@
         </p:nvSpPr>
         <p:spPr>
           <a:xfrm>
-            <a:off x="859536" y="4498848"/>
+            <a:off x="859536" y="3867911"/>
             <a:ext cx="10424160" cy="320040"/>
           </a:xfrm>
           <a:prstGeom prst="rect">
@@ -12395,7 +12395,7 @@
         </p:nvSpPr>
         <p:spPr>
           <a:xfrm>
-            <a:off x="859536" y="4901183"/>
+            <a:off x="859536" y="4270247"/>
             <a:ext cx="10424160" cy="274320"/>
           </a:xfrm>
           <a:prstGeom prst="rect">
@@ -12417,7 +12417,7 @@
                 </a:solidFill>
                 <a:latin typeface="Inter"/>
               </a:rPr>
-              <a:t>landing-cro (лендинги, CRO, 152-ФЗ) · content (контент-планы, нейминг) · smm-telegram · creative · presentation</a:t>
+              <a:t>landing-cro (лендинги, CRO, 152-ФЗ) · content (контент-планы, нейминг) · smm-telegram · creative · presentation*</a:t>
             </a:r>
           </a:p>
         </p:txBody>
@@ -12430,12 +12430,12 @@
         </p:nvSpPr>
         <p:spPr>
           <a:xfrm>
-            <a:off x="566928" y="5641848"/>
-            <a:ext cx="11064240" cy="1051560"/>
+            <a:off x="566928" y="4535423"/>
+            <a:ext cx="11064240" cy="777240"/>
           </a:xfrm>
           <a:prstGeom prst="roundRect">
             <a:avLst>
-              <a:gd name="adj" fmla="val 7826"/>
+              <a:gd name="adj" fmla="val 10588"/>
             </a:avLst>
           </a:prstGeom>
           <a:solidFill>
@@ -12478,8 +12478,8 @@
         </p:nvSpPr>
         <p:spPr>
           <a:xfrm>
-            <a:off x="566928" y="5641848"/>
-            <a:ext cx="45720" cy="1051560"/>
+            <a:off x="566928" y="4535423"/>
+            <a:ext cx="45720" cy="777240"/>
           </a:xfrm>
           <a:prstGeom prst="rect">
             <a:avLst/>
@@ -12522,7 +12522,7 @@
         </p:nvSpPr>
         <p:spPr>
           <a:xfrm>
-            <a:off x="859536" y="5861304"/>
+            <a:off x="859536" y="4754879"/>
             <a:ext cx="10424160" cy="320040"/>
           </a:xfrm>
           <a:prstGeom prst="rect">
@@ -12557,7 +12557,7 @@
         </p:nvSpPr>
         <p:spPr>
           <a:xfrm>
-            <a:off x="859536" y="6263640"/>
+            <a:off x="859536" y="5157215"/>
             <a:ext cx="10424160" cy="274320"/>
           </a:xfrm>
           <a:prstGeom prst="rect">
@@ -12579,14 +12579,176 @@
                 </a:solidFill>
                 <a:latin typeface="Inter"/>
               </a:rPr>
-              <a:t>crm-retention (RFM + когорты) · reputation (отзывы, карты) · sales · support · ops (NDA, стейкхолдеры)</a:t>
-            </a:r>
-          </a:p>
-        </p:txBody>
-      </p:sp>
-      <p:sp>
-        <p:nvSpPr>
-          <p:cNvPr id="23" name="TextBox 22"/>
+              <a:t>crm-retention (RFM + когорты) · sales · support · ops (NDA, стейкхолдеры) · reputation</a:t>
+            </a:r>
+          </a:p>
+        </p:txBody>
+      </p:sp>
+      <p:sp>
+        <p:nvSpPr>
+          <p:cNvPr id="23" name="Rounded Rectangle 22"/>
+          <p:cNvSpPr/>
+          <p:nvPr/>
+        </p:nvSpPr>
+        <p:spPr>
+          <a:xfrm>
+            <a:off x="566928" y="5422391"/>
+            <a:ext cx="11064240" cy="777240"/>
+          </a:xfrm>
+          <a:prstGeom prst="roundRect">
+            <a:avLst>
+              <a:gd name="adj" fmla="val 10588"/>
+            </a:avLst>
+          </a:prstGeom>
+          <a:solidFill>
+            <a:srgbClr val="111C2E"/>
+          </a:solidFill>
+          <a:ln w="12700">
+            <a:solidFill>
+              <a:srgbClr val="24344D"/>
+            </a:solidFill>
+          </a:ln>
+          <a:effectLst/>
+        </p:spPr>
+        <p:style>
+          <a:lnRef idx="1">
+            <a:schemeClr val="accent1"/>
+          </a:lnRef>
+          <a:fillRef idx="3">
+            <a:schemeClr val="accent1"/>
+          </a:fillRef>
+          <a:effectRef idx="2">
+            <a:schemeClr val="accent1"/>
+          </a:effectRef>
+          <a:fontRef idx="minor">
+            <a:schemeClr val="lt1"/>
+          </a:fontRef>
+        </p:style>
+        <p:txBody>
+          <a:bodyPr rtlCol="0" anchor="ctr"/>
+          <a:lstStyle/>
+          <a:p>
+            <a:pPr algn="ctr"/>
+          </a:p>
+        </p:txBody>
+      </p:sp>
+      <p:sp>
+        <p:nvSpPr>
+          <p:cNvPr id="24" name="Rectangle 23"/>
+          <p:cNvSpPr/>
+          <p:nvPr/>
+        </p:nvSpPr>
+        <p:spPr>
+          <a:xfrm>
+            <a:off x="566928" y="5422391"/>
+            <a:ext cx="45720" cy="777240"/>
+          </a:xfrm>
+          <a:prstGeom prst="rect">
+            <a:avLst/>
+          </a:prstGeom>
+          <a:solidFill>
+            <a:srgbClr val="38B2F8"/>
+          </a:solidFill>
+          <a:ln>
+            <a:noFill/>
+          </a:ln>
+          <a:effectLst/>
+        </p:spPr>
+        <p:style>
+          <a:lnRef idx="1">
+            <a:schemeClr val="accent1"/>
+          </a:lnRef>
+          <a:fillRef idx="3">
+            <a:schemeClr val="accent1"/>
+          </a:fillRef>
+          <a:effectRef idx="2">
+            <a:schemeClr val="accent1"/>
+          </a:effectRef>
+          <a:fontRef idx="minor">
+            <a:schemeClr val="lt1"/>
+          </a:fontRef>
+        </p:style>
+        <p:txBody>
+          <a:bodyPr rtlCol="0" anchor="ctr"/>
+          <a:lstStyle/>
+          <a:p>
+            <a:pPr algn="ctr"/>
+          </a:p>
+        </p:txBody>
+      </p:sp>
+      <p:sp>
+        <p:nvSpPr>
+          <p:cNvPr id="25" name="TextBox 24"/>
+          <p:cNvSpPr txBox="1"/>
+          <p:nvPr/>
+        </p:nvSpPr>
+        <p:spPr>
+          <a:xfrm>
+            <a:off x="859536" y="5641847"/>
+            <a:ext cx="10424160" cy="320040"/>
+          </a:xfrm>
+          <a:prstGeom prst="rect">
+            <a:avLst/>
+          </a:prstGeom>
+          <a:noFill/>
+        </p:spPr>
+        <p:txBody>
+          <a:bodyPr wrap="square" anchor="t" lIns="0" rIns="0" tIns="0" bIns="0">
+            <a:spAutoFit/>
+          </a:bodyPr>
+          <a:lstStyle/>
+          <a:p>
+            <a:pPr algn="l"/>
+            <a:r>
+              <a:rPr sz="1450" b="1" i="0">
+                <a:solidFill>
+                  <a:srgbClr val="38B2F8"/>
+                </a:solidFill>
+                <a:latin typeface="Inter"/>
+              </a:rPr>
+              <a:t>* ЗАГОТОВКА</a:t>
+            </a:r>
+          </a:p>
+        </p:txBody>
+      </p:sp>
+      <p:sp>
+        <p:nvSpPr>
+          <p:cNvPr id="26" name="TextBox 25"/>
+          <p:cNvSpPr txBox="1"/>
+          <p:nvPr/>
+        </p:nvSpPr>
+        <p:spPr>
+          <a:xfrm>
+            <a:off x="859536" y="6044183"/>
+            <a:ext cx="10424160" cy="274320"/>
+          </a:xfrm>
+          <a:prstGeom prst="rect">
+            <a:avLst/>
+          </a:prstGeom>
+          <a:noFill/>
+        </p:spPr>
+        <p:txBody>
+          <a:bodyPr wrap="square" anchor="t" lIns="0" rIns="0" tIns="0" bIns="0">
+            <a:spAutoFit/>
+          </a:bodyPr>
+          <a:lstStyle/>
+          <a:p>
+            <a:pPr algn="l"/>
+            <a:r>
+              <a:rPr sz="1150" b="0" i="0">
+                <a:solidFill>
+                  <a:srgbClr val="8FA3BC"/>
+                </a:solidFill>
+                <a:latin typeface="Inter"/>
+              </a:rPr>
+              <a:t>профиль без навыков репозитория: роль описана, работать нечем. Разработаем позже: vk-ads, presentation</a:t>
+            </a:r>
+          </a:p>
+        </p:txBody>
+      </p:sp>
+      <p:sp>
+        <p:nvSpPr>
+          <p:cNvPr id="27" name="TextBox 26"/>
           <p:cNvSpPr txBox="1"/>
           <p:nvPr/>
         </p:nvSpPr>
@@ -12621,7 +12783,7 @@
       </p:sp>
       <p:sp>
         <p:nvSpPr>
-          <p:cNvPr id="24" name="TextBox 23"/>
+          <p:cNvPr id="28" name="TextBox 27"/>
           <p:cNvSpPr txBox="1"/>
           <p:nvPr/>
         </p:nvSpPr>

--- a/deck/vector-marketing-01-obsidian-neon.pptx
+++ b/deck/vector-marketing-01-obsidian-neon.pptx
@@ -5022,7 +5022,7 @@
                 </a:solidFill>
                 <a:latin typeface="JetBrains Mono"/>
               </a:rPr>
-              <a:t>9 / 13</a:t>
+              <a:t>10 / 13</a:t>
             </a:r>
           </a:p>
         </p:txBody>
@@ -5035,8 +5035,8 @@
         </p:nvSpPr>
         <p:spPr>
           <a:xfrm>
-            <a:off x="8778240" y="6528816"/>
-            <a:ext cx="2834640" cy="228600"/>
+            <a:off x="7498079" y="6528816"/>
+            <a:ext cx="4114800" cy="228600"/>
           </a:xfrm>
           <a:prstGeom prst="rect">
             <a:avLst/>
@@ -6238,7 +6238,7 @@
                 </a:solidFill>
                 <a:latin typeface="JetBrains Mono"/>
               </a:rPr>
-              <a:t>9 / 13</a:t>
+              <a:t>11 / 13</a:t>
             </a:r>
           </a:p>
         </p:txBody>
@@ -6251,8 +6251,8 @@
         </p:nvSpPr>
         <p:spPr>
           <a:xfrm>
-            <a:off x="8778240" y="6528816"/>
-            <a:ext cx="2834640" cy="228600"/>
+            <a:off x="7498079" y="6528816"/>
+            <a:ext cx="4114800" cy="228600"/>
           </a:xfrm>
           <a:prstGeom prst="rect">
             <a:avLst/>
@@ -7140,8 +7140,8 @@
         </p:nvSpPr>
         <p:spPr>
           <a:xfrm>
-            <a:off x="8778240" y="6528816"/>
-            <a:ext cx="2834640" cy="228600"/>
+            <a:off x="7498079" y="6528816"/>
+            <a:ext cx="4114800" cy="228600"/>
           </a:xfrm>
           <a:prstGeom prst="rect">
             <a:avLst/>
@@ -8499,8 +8499,8 @@
         </p:nvSpPr>
         <p:spPr>
           <a:xfrm>
-            <a:off x="8778240" y="6528816"/>
-            <a:ext cx="2834640" cy="228600"/>
+            <a:off x="7498079" y="6528816"/>
+            <a:ext cx="4114800" cy="228600"/>
           </a:xfrm>
           <a:prstGeom prst="rect">
             <a:avLst/>
@@ -9698,8 +9698,8 @@
         </p:nvSpPr>
         <p:spPr>
           <a:xfrm>
-            <a:off x="8778240" y="6528816"/>
-            <a:ext cx="2834640" cy="228600"/>
+            <a:off x="7498079" y="6528816"/>
+            <a:ext cx="4114800" cy="228600"/>
           </a:xfrm>
           <a:prstGeom prst="rect">
             <a:avLst/>
@@ -10897,8 +10897,8 @@
         </p:nvSpPr>
         <p:spPr>
           <a:xfrm>
-            <a:off x="8778240" y="6528816"/>
-            <a:ext cx="2834640" cy="228600"/>
+            <a:off x="7498079" y="6528816"/>
+            <a:ext cx="4114800" cy="228600"/>
           </a:xfrm>
           <a:prstGeom prst="rect">
             <a:avLst/>
@@ -11681,8 +11681,8 @@
         </p:nvSpPr>
         <p:spPr>
           <a:xfrm>
-            <a:off x="8778240" y="6528816"/>
-            <a:ext cx="2834640" cy="228600"/>
+            <a:off x="7498079" y="6528816"/>
+            <a:ext cx="4114800" cy="228600"/>
           </a:xfrm>
           <a:prstGeom prst="rect">
             <a:avLst/>
@@ -12776,7 +12776,7 @@
                 </a:solidFill>
                 <a:latin typeface="JetBrains Mono"/>
               </a:rPr>
-              <a:t>5 / 13</a:t>
+              <a:t>6 / 13</a:t>
             </a:r>
           </a:p>
         </p:txBody>
@@ -12789,8 +12789,8 @@
         </p:nvSpPr>
         <p:spPr>
           <a:xfrm>
-            <a:off x="8778240" y="6528816"/>
-            <a:ext cx="2834640" cy="228600"/>
+            <a:off x="7498079" y="6528816"/>
+            <a:ext cx="4114800" cy="228600"/>
           </a:xfrm>
           <a:prstGeom prst="rect">
             <a:avLst/>
@@ -14045,7 +14045,7 @@
                 </a:solidFill>
                 <a:latin typeface="JetBrains Mono"/>
               </a:rPr>
-              <a:t>6 / 13</a:t>
+              <a:t>7 / 13</a:t>
             </a:r>
           </a:p>
         </p:txBody>
@@ -14058,8 +14058,8 @@
         </p:nvSpPr>
         <p:spPr>
           <a:xfrm>
-            <a:off x="8778240" y="6528816"/>
-            <a:ext cx="2834640" cy="228600"/>
+            <a:off x="7498079" y="6528816"/>
+            <a:ext cx="4114800" cy="228600"/>
           </a:xfrm>
           <a:prstGeom prst="rect">
             <a:avLst/>
@@ -15423,7 +15423,7 @@
                 </a:solidFill>
                 <a:latin typeface="JetBrains Mono"/>
               </a:rPr>
-              <a:t>7 / 13</a:t>
+              <a:t>8 / 13</a:t>
             </a:r>
           </a:p>
         </p:txBody>
@@ -15436,8 +15436,8 @@
         </p:nvSpPr>
         <p:spPr>
           <a:xfrm>
-            <a:off x="8778240" y="6528816"/>
-            <a:ext cx="2834640" cy="228600"/>
+            <a:off x="7498079" y="6528816"/>
+            <a:ext cx="4114800" cy="228600"/>
           </a:xfrm>
           <a:prstGeom prst="rect">
             <a:avLst/>
@@ -16369,7 +16369,7 @@
                 </a:solidFill>
                 <a:latin typeface="JetBrains Mono"/>
               </a:rPr>
-              <a:t>8 / 13</a:t>
+              <a:t>9 / 13</a:t>
             </a:r>
           </a:p>
         </p:txBody>
@@ -16382,8 +16382,8 @@
         </p:nvSpPr>
         <p:spPr>
           <a:xfrm>
-            <a:off x="8778240" y="6528816"/>
-            <a:ext cx="2834640" cy="228600"/>
+            <a:off x="7498079" y="6528816"/>
+            <a:ext cx="4114800" cy="228600"/>
           </a:xfrm>
           <a:prstGeom prst="rect">
             <a:avLst/>
